--- a/Localizzazione Tumori Cerebrali RL.pptx
+++ b/Localizzazione Tumori Cerebrali RL.pptx
@@ -314,7 +314,7 @@
           <a:p>
             <a:fld id="{5BCAD085-E8A6-8845-BD4E-CB4CCA059FC4}" type="datetimeFigureOut">
               <a:rPr lang="en-US" smtClean="0"/>
-              <a:t>7/23/2026</a:t>
+              <a:t>7/23/26</a:t>
             </a:fld>
             <a:endParaRPr lang="en-US"/>
           </a:p>
@@ -482,7 +482,7 @@
           <a:p>
             <a:fld id="{5BCAD085-E8A6-8845-BD4E-CB4CCA059FC4}" type="datetimeFigureOut">
               <a:rPr lang="en-US" smtClean="0"/>
-              <a:t>7/23/2026</a:t>
+              <a:t>7/23/26</a:t>
             </a:fld>
             <a:endParaRPr lang="en-US"/>
           </a:p>
@@ -660,7 +660,7 @@
           <a:p>
             <a:fld id="{5BCAD085-E8A6-8845-BD4E-CB4CCA059FC4}" type="datetimeFigureOut">
               <a:rPr lang="en-US" smtClean="0"/>
-              <a:t>7/23/2026</a:t>
+              <a:t>7/23/26</a:t>
             </a:fld>
             <a:endParaRPr lang="en-US"/>
           </a:p>
@@ -828,7 +828,7 @@
           <a:p>
             <a:fld id="{5BCAD085-E8A6-8845-BD4E-CB4CCA059FC4}" type="datetimeFigureOut">
               <a:rPr lang="en-US" smtClean="0"/>
-              <a:t>7/23/2026</a:t>
+              <a:t>7/23/26</a:t>
             </a:fld>
             <a:endParaRPr lang="en-US"/>
           </a:p>
@@ -1073,7 +1073,7 @@
           <a:p>
             <a:fld id="{5BCAD085-E8A6-8845-BD4E-CB4CCA059FC4}" type="datetimeFigureOut">
               <a:rPr lang="en-US" smtClean="0"/>
-              <a:t>7/23/2026</a:t>
+              <a:t>7/23/26</a:t>
             </a:fld>
             <a:endParaRPr lang="en-US"/>
           </a:p>
@@ -1358,7 +1358,7 @@
           <a:p>
             <a:fld id="{5BCAD085-E8A6-8845-BD4E-CB4CCA059FC4}" type="datetimeFigureOut">
               <a:rPr lang="en-US" smtClean="0"/>
-              <a:t>7/23/2026</a:t>
+              <a:t>7/23/26</a:t>
             </a:fld>
             <a:endParaRPr lang="en-US"/>
           </a:p>
@@ -1777,7 +1777,7 @@
           <a:p>
             <a:fld id="{5BCAD085-E8A6-8845-BD4E-CB4CCA059FC4}" type="datetimeFigureOut">
               <a:rPr lang="en-US" smtClean="0"/>
-              <a:t>7/23/2026</a:t>
+              <a:t>7/23/26</a:t>
             </a:fld>
             <a:endParaRPr lang="en-US"/>
           </a:p>
@@ -1894,7 +1894,7 @@
           <a:p>
             <a:fld id="{5BCAD085-E8A6-8845-BD4E-CB4CCA059FC4}" type="datetimeFigureOut">
               <a:rPr lang="en-US" smtClean="0"/>
-              <a:t>7/23/2026</a:t>
+              <a:t>7/23/26</a:t>
             </a:fld>
             <a:endParaRPr lang="en-US"/>
           </a:p>
@@ -1989,7 +1989,7 @@
           <a:p>
             <a:fld id="{5BCAD085-E8A6-8845-BD4E-CB4CCA059FC4}" type="datetimeFigureOut">
               <a:rPr lang="en-US" smtClean="0"/>
-              <a:t>7/23/2026</a:t>
+              <a:t>7/23/26</a:t>
             </a:fld>
             <a:endParaRPr lang="en-US"/>
           </a:p>
@@ -2264,7 +2264,7 @@
           <a:p>
             <a:fld id="{5BCAD085-E8A6-8845-BD4E-CB4CCA059FC4}" type="datetimeFigureOut">
               <a:rPr lang="en-US" smtClean="0"/>
-              <a:t>7/23/2026</a:t>
+              <a:t>7/23/26</a:t>
             </a:fld>
             <a:endParaRPr lang="en-US"/>
           </a:p>
@@ -2516,7 +2516,7 @@
           <a:p>
             <a:fld id="{5BCAD085-E8A6-8845-BD4E-CB4CCA059FC4}" type="datetimeFigureOut">
               <a:rPr lang="en-US" smtClean="0"/>
-              <a:t>7/23/2026</a:t>
+              <a:t>7/23/26</a:t>
             </a:fld>
             <a:endParaRPr lang="en-US"/>
           </a:p>
@@ -2727,7 +2727,7 @@
           <a:p>
             <a:fld id="{5BCAD085-E8A6-8845-BD4E-CB4CCA059FC4}" type="datetimeFigureOut">
               <a:rPr lang="en-US" smtClean="0"/>
-              <a:t>7/23/2026</a:t>
+              <a:t>7/23/26</a:t>
             </a:fld>
             <a:endParaRPr lang="en-US"/>
           </a:p>
@@ -3159,7 +3159,7 @@
         <p:spPr>
           <a:xfrm>
             <a:off x="1095375" y="2146994"/>
-            <a:ext cx="10001250" cy="1097160"/>
+            <a:ext cx="10001250" cy="1654940"/>
           </a:xfrm>
           <a:prstGeom prst="rect">
             <a:avLst/>
@@ -3178,14 +3178,110 @@
               </a:lnSpc>
             </a:pPr>
             <a:r>
-              <a:rPr sz="3600" b="1" i="0" u="none">
+              <a:rPr sz="3600" b="1" i="0" u="none" dirty="0" err="1">
                 <a:solidFill>
                   <a:srgbClr val="FFFFFF"/>
                 </a:solidFill>
                 <a:latin typeface="Poppins"/>
               </a:rPr>
-              <a:t>Localizzazione di Tumori Cerebrali da MRI mediante Reinforcement Learning</a:t>
-            </a:r>
+              <a:t>Localizzazione</a:t>
+            </a:r>
+            <a:r>
+              <a:rPr sz="3600" b="1" i="0" u="none" dirty="0">
+                <a:solidFill>
+                  <a:srgbClr val="FFFFFF"/>
+                </a:solidFill>
+                <a:latin typeface="Poppins"/>
+              </a:rPr>
+              <a:t> di </a:t>
+            </a:r>
+            <a:r>
+              <a:rPr sz="3600" b="1" i="0" u="none" dirty="0" err="1">
+                <a:solidFill>
+                  <a:srgbClr val="FFFFFF"/>
+                </a:solidFill>
+                <a:latin typeface="Poppins"/>
+              </a:rPr>
+              <a:t>Tumori</a:t>
+            </a:r>
+            <a:r>
+              <a:rPr sz="3600" b="1" i="0" u="none" dirty="0">
+                <a:solidFill>
+                  <a:srgbClr val="FFFFFF"/>
+                </a:solidFill>
+                <a:latin typeface="Poppins"/>
+              </a:rPr>
+              <a:t> </a:t>
+            </a:r>
+            <a:r>
+              <a:rPr sz="3600" b="1" i="0" u="none" dirty="0" err="1">
+                <a:solidFill>
+                  <a:srgbClr val="FFFFFF"/>
+                </a:solidFill>
+                <a:latin typeface="Poppins"/>
+              </a:rPr>
+              <a:t>Cerebrali</a:t>
+            </a:r>
+            <a:r>
+              <a:rPr sz="3600" b="1" i="0" u="none" dirty="0">
+                <a:solidFill>
+                  <a:srgbClr val="FFFFFF"/>
+                </a:solidFill>
+                <a:latin typeface="Poppins"/>
+              </a:rPr>
+              <a:t> da MRI </a:t>
+            </a:r>
+            <a:r>
+              <a:rPr sz="3600" b="1" i="0" u="none" dirty="0" err="1">
+                <a:solidFill>
+                  <a:srgbClr val="FFFFFF"/>
+                </a:solidFill>
+                <a:latin typeface="Poppins"/>
+              </a:rPr>
+              <a:t>mediante</a:t>
+            </a:r>
+            <a:r>
+              <a:rPr sz="3600" b="1" i="0" u="none" dirty="0">
+                <a:solidFill>
+                  <a:srgbClr val="FFFFFF"/>
+                </a:solidFill>
+                <a:latin typeface="Poppins"/>
+              </a:rPr>
+              <a:t> Reinforcement Learning</a:t>
+            </a:r>
+            <a:r>
+              <a:rPr lang="it-IT" sz="3600" b="1" i="0" u="none" dirty="0">
+                <a:solidFill>
+                  <a:srgbClr val="FFFFFF"/>
+                </a:solidFill>
+                <a:latin typeface="Poppins"/>
+              </a:rPr>
+              <a:t> con </a:t>
+            </a:r>
+            <a:r>
+              <a:rPr lang="it-IT" sz="3600" b="1" i="0" u="none" dirty="0" err="1">
+                <a:solidFill>
+                  <a:srgbClr val="FFFFFF"/>
+                </a:solidFill>
+                <a:latin typeface="Poppins"/>
+              </a:rPr>
+              <a:t>Imitation</a:t>
+            </a:r>
+            <a:r>
+              <a:rPr lang="it-IT" sz="3600" b="1" i="0" u="none" dirty="0">
+                <a:solidFill>
+                  <a:srgbClr val="FFFFFF"/>
+                </a:solidFill>
+                <a:latin typeface="Poppins"/>
+              </a:rPr>
+              <a:t> Learning guidato</a:t>
+            </a:r>
+            <a:endParaRPr sz="3600" b="1" i="0" u="none" dirty="0">
+              <a:solidFill>
+                <a:srgbClr val="FFFFFF"/>
+              </a:solidFill>
+              <a:latin typeface="Poppins"/>
+            </a:endParaRPr>
           </a:p>
         </p:txBody>
       </p:sp>
@@ -3197,8 +3293,8 @@
         </p:nvSpPr>
         <p:spPr>
           <a:xfrm>
-            <a:off x="2047875" y="3625155"/>
-            <a:ext cx="8096250" cy="571500"/>
+            <a:off x="2047875" y="3929952"/>
+            <a:ext cx="8096250" cy="271998"/>
           </a:xfrm>
           <a:prstGeom prst="rect">
             <a:avLst/>
@@ -3217,14 +3313,155 @@
               </a:lnSpc>
             </a:pPr>
             <a:r>
+              <a:rPr sz="1500" b="0" i="0" u="none" dirty="0" err="1">
+                <a:solidFill>
+                  <a:srgbClr val="94A3B8"/>
+                </a:solidFill>
+                <a:latin typeface="Inter"/>
+              </a:rPr>
+              <a:t>Apprendimento</a:t>
+            </a:r>
+            <a:r>
+              <a:rPr sz="1500" b="0" i="0" u="none" dirty="0">
+                <a:solidFill>
+                  <a:srgbClr val="94A3B8"/>
+                </a:solidFill>
+                <a:latin typeface="Inter"/>
+              </a:rPr>
+              <a:t> </a:t>
+            </a:r>
+            <a:r>
+              <a:rPr lang="it-IT" sz="1500" dirty="0">
+                <a:solidFill>
+                  <a:srgbClr val="94A3B8"/>
+                </a:solidFill>
+                <a:latin typeface="Inter"/>
+              </a:rPr>
+              <a:t>d</a:t>
+            </a:r>
+            <a:r>
+              <a:rPr sz="1500" b="0" i="0" u="none" dirty="0" err="1">
+                <a:solidFill>
+                  <a:srgbClr val="94A3B8"/>
+                </a:solidFill>
+                <a:latin typeface="Inter"/>
+              </a:rPr>
+              <a:t>ecisionale</a:t>
+            </a:r>
+            <a:r>
+              <a:rPr sz="1500" b="0" i="0" u="none" dirty="0">
+                <a:solidFill>
+                  <a:srgbClr val="94A3B8"/>
+                </a:solidFill>
+                <a:latin typeface="Inter"/>
+              </a:rPr>
+              <a:t> </a:t>
+            </a:r>
+            <a:r>
+              <a:rPr lang="it-IT" sz="1500" dirty="0">
+                <a:solidFill>
+                  <a:srgbClr val="94A3B8"/>
+                </a:solidFill>
+                <a:latin typeface="Inter"/>
+              </a:rPr>
+              <a:t>s</a:t>
+            </a:r>
+            <a:r>
+              <a:rPr sz="1500" b="0" i="0" u="none" dirty="0" err="1">
+                <a:solidFill>
+                  <a:srgbClr val="94A3B8"/>
+                </a:solidFill>
+                <a:latin typeface="Inter"/>
+              </a:rPr>
+              <a:t>equenziale</a:t>
+            </a:r>
+            <a:r>
+              <a:rPr sz="1500" b="0" i="0" u="none" dirty="0">
+                <a:solidFill>
+                  <a:srgbClr val="94A3B8"/>
+                </a:solidFill>
+                <a:latin typeface="Inter"/>
+              </a:rPr>
+              <a:t> </a:t>
+            </a:r>
+            <a:r>
+              <a:rPr lang="it-IT" sz="1500" dirty="0">
+                <a:solidFill>
+                  <a:srgbClr val="94A3B8"/>
+                </a:solidFill>
+                <a:latin typeface="Inter"/>
+              </a:rPr>
+              <a:t>g</a:t>
+            </a:r>
+            <a:r>
+              <a:rPr sz="1500" b="0" i="0" u="none" dirty="0" err="1">
+                <a:solidFill>
+                  <a:srgbClr val="94A3B8"/>
+                </a:solidFill>
+                <a:latin typeface="Inter"/>
+              </a:rPr>
+              <a:t>uidato</a:t>
+            </a:r>
+            <a:r>
+              <a:rPr sz="1500" b="0" i="0" u="none" dirty="0">
+                <a:solidFill>
+                  <a:srgbClr val="94A3B8"/>
+                </a:solidFill>
+                <a:latin typeface="Inter"/>
+              </a:rPr>
+              <a:t> da Imitation Learning con </a:t>
+            </a:r>
+            <a:r>
+              <a:rPr lang="it-IT" sz="1500" dirty="0">
+                <a:solidFill>
+                  <a:srgbClr val="94A3B8"/>
+                </a:solidFill>
+                <a:latin typeface="Inter"/>
+              </a:rPr>
+              <a:t>o</a:t>
+            </a:r>
+            <a:r>
+              <a:rPr sz="1500" b="0" i="0" u="none" dirty="0" err="1">
+                <a:solidFill>
+                  <a:srgbClr val="94A3B8"/>
+                </a:solidFill>
+                <a:latin typeface="Inter"/>
+              </a:rPr>
+              <a:t>racolo</a:t>
+            </a:r>
+            <a:r>
+              <a:rPr sz="1500" b="0" i="0" u="none" dirty="0">
+                <a:solidFill>
+                  <a:srgbClr val="94A3B8"/>
+                </a:solidFill>
+                <a:latin typeface="Inter"/>
+              </a:rPr>
+              <a:t> </a:t>
+            </a:r>
+            <a:r>
+              <a:rPr lang="it-IT" sz="1500">
+                <a:solidFill>
+                  <a:srgbClr val="94A3B8"/>
+                </a:solidFill>
+                <a:latin typeface="Inter"/>
+              </a:rPr>
+              <a:t>l</a:t>
+            </a:r>
+            <a:r>
               <a:rPr sz="1500" b="0" i="0" u="none">
                 <a:solidFill>
                   <a:srgbClr val="94A3B8"/>
                 </a:solidFill>
                 <a:latin typeface="Inter"/>
               </a:rPr>
-              <a:t>Apprendimento Decisionale Sequenziale Guidato da Imitation Learning con Oracolo Lookahead</a:t>
-            </a:r>
+              <a:t>ookahead</a:t>
+            </a:r>
+            <a:endParaRPr sz="1500" b="0" i="0" u="none" dirty="0">
+              <a:solidFill>
+                <a:srgbClr val="94A3B8"/>
+              </a:solidFill>
+              <a:latin typeface="Inter"/>
+            </a:endParaRPr>
           </a:p>
         </p:txBody>
       </p:sp>
@@ -3280,7 +3517,7 @@
               </a:lnSpc>
             </a:pPr>
             <a:r>
-              <a:rPr sz="1200" b="0" i="0" u="none">
+              <a:rPr sz="1200" b="0" i="0" u="none" dirty="0">
                 <a:solidFill>
                   <a:srgbClr val="CBD5E1"/>
                 </a:solidFill>
